--- a/templates/samples/template_navy.pptx
+++ b/templates/samples/template_navy.pptx
@@ -1061,7 +1061,7 @@
             <a:avLst/>
           </a:prstGeom>
           <a:solidFill>
-            <a:srgbClr val="0072B2"/>
+            <a:srgbClr val="1A3A5C"/>
           </a:solidFill>
           <a:ln/>
         </p:spPr>
@@ -1081,8 +1081,8 @@
             <a:avLst/>
           </a:prstGeom>
           <a:solidFill>
-            <a:srgbClr val="56B4E9">
-              <a:alpha val="30000"/>
+            <a:srgbClr val="2B5A8A">
+              <a:alpha val="40000"/>
             </a:srgbClr>
           </a:solidFill>
           <a:ln/>
@@ -1103,7 +1103,7 @@
             <a:avLst/>
           </a:prstGeom>
           <a:solidFill>
-            <a:srgbClr val="E69F00">
+            <a:srgbClr val="C9A84C">
               <a:alpha val="70000"/>
             </a:srgbClr>
           </a:solidFill>
@@ -1125,7 +1125,7 @@
             <a:avLst/>
           </a:prstGeom>
           <a:solidFill>
-            <a:srgbClr val="00508A"/>
+            <a:srgbClr val="2B5A8A"/>
           </a:solidFill>
           <a:ln/>
         </p:spPr>
@@ -1145,7 +1145,7 @@
             <a:avLst/>
           </a:prstGeom>
           <a:solidFill>
-            <a:srgbClr val="E69F00"/>
+            <a:srgbClr val="C9A84C"/>
           </a:solidFill>
           <a:ln/>
         </p:spPr>
@@ -1177,7 +1177,7 @@
             <a:r>
               <a:rPr lang="en-US" sz="1400" dirty="0">
                 <a:solidFill>
-                  <a:srgbClr val="B3D4F0"/>
+                  <a:srgbClr val="B8C9E0"/>
                 </a:solidFill>
                 <a:latin typeface="Arial" pitchFamily="34" charset="0"/>
                 <a:ea typeface="Arial" pitchFamily="34" charset="-122"/>
@@ -1243,7 +1243,7 @@
             <a:avLst/>
           </a:prstGeom>
           <a:solidFill>
-            <a:srgbClr val="E69F00"/>
+            <a:srgbClr val="C9A84C"/>
           </a:solidFill>
           <a:ln/>
         </p:spPr>
@@ -1275,7 +1275,7 @@
             <a:r>
               <a:rPr lang="en-US" sz="1500" dirty="0">
                 <a:solidFill>
-                  <a:srgbClr val="B3D4F0"/>
+                  <a:srgbClr val="B8C9E0"/>
                 </a:solidFill>
                 <a:latin typeface="Arial" pitchFamily="34" charset="0"/>
                 <a:ea typeface="Arial" pitchFamily="34" charset="-122"/>
@@ -1416,7 +1416,7 @@
             <a:r>
               <a:rPr lang="en-US" sz="1200" dirty="0">
                 <a:solidFill>
-                  <a:srgbClr val="E69F00"/>
+                  <a:srgbClr val="C9A84C"/>
                 </a:solidFill>
                 <a:latin typeface="Arial" pitchFamily="34" charset="0"/>
                 <a:ea typeface="Arial" pitchFamily="34" charset="-122"/>
@@ -1475,7 +1475,7 @@
             <a:avLst/>
           </a:prstGeom>
           <a:solidFill>
-            <a:srgbClr val="0072B2"/>
+            <a:srgbClr val="1A3A5C"/>
           </a:solidFill>
           <a:ln/>
         </p:spPr>
@@ -1495,7 +1495,7 @@
             <a:avLst/>
           </a:prstGeom>
           <a:solidFill>
-            <a:srgbClr val="E69F00"/>
+            <a:srgbClr val="C9A84C"/>
           </a:solidFill>
           <a:ln/>
         </p:spPr>
@@ -1515,7 +1515,7 @@
             <a:avLst/>
           </a:prstGeom>
           <a:solidFill>
-            <a:srgbClr val="0072B2"/>
+            <a:srgbClr val="1A3A5C"/>
           </a:solidFill>
           <a:ln/>
         </p:spPr>
@@ -1547,7 +1547,7 @@
             <a:r>
               <a:rPr lang="en-US" sz="2800" b="1" dirty="0">
                 <a:solidFill>
-                  <a:srgbClr val="0072B2"/>
+                  <a:srgbClr val="1A3A5C"/>
                 </a:solidFill>
                 <a:latin typeface="Georgia" pitchFamily="34" charset="0"/>
                 <a:ea typeface="Georgia" pitchFamily="34" charset="-122"/>
@@ -1574,7 +1574,7 @@
             <a:avLst/>
           </a:prstGeom>
           <a:solidFill>
-            <a:srgbClr val="E5E7EB"/>
+            <a:srgbClr val="D1D5DB"/>
           </a:solidFill>
           <a:ln/>
         </p:spPr>
@@ -1649,7 +1649,7 @@
             <a:r>
               <a:rPr lang="en-US" sz="1800" dirty="0">
                 <a:solidFill>
-                  <a:srgbClr val="1A1A2E"/>
+                  <a:srgbClr val="2D2D2D"/>
                 </a:solidFill>
                 <a:latin typeface="Arial" pitchFamily="34" charset="0"/>
                 <a:ea typeface="Arial" pitchFamily="34" charset="-122"/>
@@ -1670,7 +1670,7 @@
             <a:r>
               <a:rPr lang="en-US" sz="1800" dirty="0">
                 <a:solidFill>
-                  <a:srgbClr val="1A1A2E"/>
+                  <a:srgbClr val="2D2D2D"/>
                 </a:solidFill>
                 <a:latin typeface="Arial" pitchFamily="34" charset="0"/>
                 <a:ea typeface="Arial" pitchFamily="34" charset="-122"/>
@@ -1691,7 +1691,7 @@
             <a:r>
               <a:rPr lang="en-US" sz="1800" dirty="0">
                 <a:solidFill>
-                  <a:srgbClr val="1A1A2E"/>
+                  <a:srgbClr val="2D2D2D"/>
                 </a:solidFill>
                 <a:latin typeface="Arial" pitchFamily="34" charset="0"/>
                 <a:ea typeface="Arial" pitchFamily="34" charset="-122"/>
@@ -1712,7 +1712,7 @@
             <a:r>
               <a:rPr lang="en-US" sz="1800" dirty="0">
                 <a:solidFill>
-                  <a:srgbClr val="1A1A2E"/>
+                  <a:srgbClr val="2D2D2D"/>
                 </a:solidFill>
                 <a:latin typeface="Arial" pitchFamily="34" charset="0"/>
                 <a:ea typeface="Arial" pitchFamily="34" charset="-122"/>
@@ -1741,11 +1741,11 @@
             </a:avLst>
           </a:prstGeom>
           <a:solidFill>
-            <a:srgbClr val="F8F9FA"/>
+            <a:srgbClr val="F8F6F0"/>
           </a:solidFill>
           <a:ln w="6350">
             <a:solidFill>
-              <a:srgbClr val="E5E7EB"/>
+              <a:srgbClr val="D1D5DB"/>
             </a:solidFill>
             <a:prstDash val="solid"/>
           </a:ln>
@@ -1766,7 +1766,7 @@
             <a:avLst/>
           </a:prstGeom>
           <a:solidFill>
-            <a:srgbClr val="E69F00"/>
+            <a:srgbClr val="C9A84C"/>
           </a:solidFill>
           <a:ln/>
         </p:spPr>
@@ -1786,7 +1786,7 @@
             <a:avLst/>
           </a:prstGeom>
           <a:solidFill>
-            <a:srgbClr val="56B4E9"/>
+            <a:srgbClr val="2B5A8A"/>
           </a:solidFill>
           <a:ln/>
         </p:spPr>
@@ -1818,7 +1818,7 @@
             <a:r>
               <a:rPr lang="en-US" sz="1600" dirty="0">
                 <a:solidFill>
-                  <a:srgbClr val="1A1A2E"/>
+                  <a:srgbClr val="1A3A5C"/>
                 </a:solidFill>
                 <a:latin typeface="Arial" pitchFamily="34" charset="0"/>
                 <a:ea typeface="Arial" pitchFamily="34" charset="-122"/>
@@ -1870,7 +1870,7 @@
             <a:avLst/>
           </a:prstGeom>
           <a:solidFill>
-            <a:srgbClr val="0072B2"/>
+            <a:srgbClr val="1A3A5C"/>
           </a:solidFill>
           <a:ln/>
         </p:spPr>
@@ -1890,8 +1890,8 @@
             <a:avLst/>
           </a:prstGeom>
           <a:solidFill>
-            <a:srgbClr val="56B4E9">
-              <a:alpha val="25000"/>
+            <a:srgbClr val="2B5A8A">
+              <a:alpha val="35000"/>
             </a:srgbClr>
           </a:solidFill>
           <a:ln/>
@@ -1912,7 +1912,7 @@
             <a:avLst/>
           </a:prstGeom>
           <a:solidFill>
-            <a:srgbClr val="E69F00"/>
+            <a:srgbClr val="C9A84C"/>
           </a:solidFill>
           <a:ln/>
         </p:spPr>
